--- a/brand/vismay-deck.pptx
+++ b/brand/vismay-deck.pptx
@@ -4972,7 +4972,7 @@
         </p:nvSpPr>
         <p:spPr>
           <a:xfrm>
-            <a:off x="594360" y="2340864"/>
+            <a:off x="594360" y="2203704"/>
             <a:ext cx="128016" cy="128016"/>
           </a:xfrm>
           <a:prstGeom prst="ellipse">
@@ -4992,8 +4992,8 @@
         </p:nvSpPr>
         <p:spPr>
           <a:xfrm>
-            <a:off x="868680" y="2194560"/>
-            <a:ext cx="7772400" cy="320040"/>
+            <a:off x="868680" y="2057400"/>
+            <a:ext cx="7772400" cy="292608"/>
           </a:xfrm>
           <a:prstGeom prst="rect">
             <a:avLst/>
@@ -5031,24 +5031,24 @@
         </p:nvSpPr>
         <p:spPr>
           <a:xfrm>
-            <a:off x="868680" y="2514600"/>
-            <a:ext cx="7772400" cy="274320"/>
-          </a:xfrm>
-          <a:prstGeom prst="rect">
-            <a:avLst/>
-          </a:prstGeom>
-          <a:noFill/>
-          <a:ln/>
-        </p:spPr>
-        <p:txBody>
-          <a:bodyPr wrap="square" lIns="0" tIns="0" rIns="0" bIns="0" rtlCol="0" anchor="ctr"/>
-          <a:lstStyle/>
-          <a:p>
-            <a:pPr indent="0" marL="0">
-              <a:buNone/>
-            </a:pPr>
-            <a:r>
-              <a:rPr lang="en-US" sz="1200" i="1" dirty="0">
+            <a:off x="868680" y="2359152"/>
+            <a:ext cx="7772400" cy="457200"/>
+          </a:xfrm>
+          <a:prstGeom prst="rect">
+            <a:avLst/>
+          </a:prstGeom>
+          <a:noFill/>
+          <a:ln/>
+        </p:spPr>
+        <p:txBody>
+          <a:bodyPr wrap="square" lIns="0" tIns="0" rIns="0" bIns="0" rtlCol="0" anchor="t"/>
+          <a:lstStyle/>
+          <a:p>
+            <a:pPr indent="0" marL="0">
+              <a:buNone/>
+            </a:pPr>
+            <a:r>
+              <a:rPr lang="en-US" sz="1150" i="1" dirty="0">
                 <a:solidFill>
                   <a:srgbClr val="B5A99C"/>
                 </a:solidFill>
@@ -5058,7 +5058,7 @@
               </a:rPr>
               <a:t>in a domain on (or off) the list — pets, manufacturing, food, science, art, architecture, sport.</a:t>
             </a:r>
-            <a:endParaRPr lang="en-US" sz="1200" dirty="0"/>
+            <a:endParaRPr lang="en-US" sz="1150" dirty="0"/>
           </a:p>
         </p:txBody>
       </p:sp>
@@ -5070,7 +5070,7 @@
         </p:nvSpPr>
         <p:spPr>
           <a:xfrm>
-            <a:off x="594360" y="2980944"/>
+            <a:off x="594360" y="2916936"/>
             <a:ext cx="128016" cy="128016"/>
           </a:xfrm>
           <a:prstGeom prst="ellipse">
@@ -5090,8 +5090,8 @@
         </p:nvSpPr>
         <p:spPr>
           <a:xfrm>
-            <a:off x="868680" y="2834640"/>
-            <a:ext cx="7772400" cy="320040"/>
+            <a:off x="868680" y="2770632"/>
+            <a:ext cx="7772400" cy="292608"/>
           </a:xfrm>
           <a:prstGeom prst="rect">
             <a:avLst/>
@@ -5115,7 +5115,7 @@
                 <a:ea typeface="Calibri" pitchFamily="34" charset="-122"/>
                 <a:cs typeface="Calibri" pitchFamily="34" charset="-120"/>
               </a:rPr>
-              <a:t>COLLABORATORS ON THE ENGINE</a:t>
+              <a:t>BUILD AND GROW AN IP WITH ME</a:t>
             </a:r>
             <a:endParaRPr lang="en-US" sz="1200" dirty="0"/>
           </a:p>
@@ -5129,24 +5129,24 @@
         </p:nvSpPr>
         <p:spPr>
           <a:xfrm>
-            <a:off x="868680" y="3154680"/>
-            <a:ext cx="7772400" cy="274320"/>
-          </a:xfrm>
-          <a:prstGeom prst="rect">
-            <a:avLst/>
-          </a:prstGeom>
-          <a:noFill/>
-          <a:ln/>
-        </p:spPr>
-        <p:txBody>
-          <a:bodyPr wrap="square" lIns="0" tIns="0" rIns="0" bIns="0" rtlCol="0" anchor="ctr"/>
-          <a:lstStyle/>
-          <a:p>
-            <a:pPr indent="0" marL="0">
-              <a:buNone/>
-            </a:pPr>
-            <a:r>
-              <a:rPr lang="en-US" sz="1200" i="1" dirty="0">
+            <a:off x="868680" y="3072384"/>
+            <a:ext cx="7772400" cy="457200"/>
+          </a:xfrm>
+          <a:prstGeom prst="rect">
+            <a:avLst/>
+          </a:prstGeom>
+          <a:noFill/>
+          <a:ln/>
+        </p:spPr>
+        <p:txBody>
+          <a:bodyPr wrap="square" lIns="0" tIns="0" rIns="0" bIns="0" rtlCol="0" anchor="t"/>
+          <a:lstStyle/>
+          <a:p>
+            <a:pPr indent="0" marL="0">
+              <a:buNone/>
+            </a:pPr>
+            <a:r>
+              <a:rPr lang="en-US" sz="1150" i="1" dirty="0">
                 <a:solidFill>
                   <a:srgbClr val="B5A99C"/>
                 </a:solidFill>
@@ -5154,9 +5154,9 @@
                 <a:ea typeface="Georgia" pitchFamily="34" charset="-122"/>
                 <a:cs typeface="Georgia" pitchFamily="34" charset="-120"/>
               </a:rPr>
-              <a:t>verticals, native rendering, content tooling, admin DX.</a:t>
-            </a:r>
-            <a:endParaRPr lang="en-US" sz="1200" dirty="0"/>
+              <a:t>on shared ground — something we both care about. So by the time we're 50, even our meetings are monetizable.</a:t>
+            </a:r>
+            <a:endParaRPr lang="en-US" sz="1150" dirty="0"/>
           </a:p>
         </p:txBody>
       </p:sp>
@@ -5168,7 +5168,7 @@
         </p:nvSpPr>
         <p:spPr>
           <a:xfrm>
-            <a:off x="594360" y="3621024"/>
+            <a:off x="594360" y="3630168"/>
             <a:ext cx="128016" cy="128016"/>
           </a:xfrm>
           <a:prstGeom prst="ellipse">
@@ -5188,8 +5188,8 @@
         </p:nvSpPr>
         <p:spPr>
           <a:xfrm>
-            <a:off x="868680" y="3474720"/>
-            <a:ext cx="7772400" cy="320040"/>
+            <a:off x="868680" y="3483864"/>
+            <a:ext cx="7772400" cy="292608"/>
           </a:xfrm>
           <a:prstGeom prst="rect">
             <a:avLst/>
@@ -5227,24 +5227,24 @@
         </p:nvSpPr>
         <p:spPr>
           <a:xfrm>
-            <a:off x="868680" y="3794760"/>
-            <a:ext cx="7772400" cy="274320"/>
-          </a:xfrm>
-          <a:prstGeom prst="rect">
-            <a:avLst/>
-          </a:prstGeom>
-          <a:noFill/>
-          <a:ln/>
-        </p:spPr>
-        <p:txBody>
-          <a:bodyPr wrap="square" lIns="0" tIns="0" rIns="0" bIns="0" rtlCol="0" anchor="ctr"/>
-          <a:lstStyle/>
-          <a:p>
-            <a:pPr indent="0" marL="0">
-              <a:buNone/>
-            </a:pPr>
-            <a:r>
-              <a:rPr lang="en-US" sz="1200" i="1" dirty="0">
+            <a:off x="868680" y="3785616"/>
+            <a:ext cx="7772400" cy="457200"/>
+          </a:xfrm>
+          <a:prstGeom prst="rect">
+            <a:avLst/>
+          </a:prstGeom>
+          <a:noFill/>
+          <a:ln/>
+        </p:spPr>
+        <p:txBody>
+          <a:bodyPr wrap="square" lIns="0" tIns="0" rIns="0" bIns="0" rtlCol="0" anchor="t"/>
+          <a:lstStyle/>
+          <a:p>
+            <a:pPr indent="0" marL="0">
+              <a:buNone/>
+            </a:pPr>
+            <a:r>
+              <a:rPr lang="en-US" sz="1150" i="1" dirty="0">
                 <a:solidFill>
                   <a:srgbClr val="B5A99C"/>
                 </a:solidFill>
@@ -5254,7 +5254,7 @@
               </a:rPr>
               <a:t>named, slow, human, built for the long run.</a:t>
             </a:r>
-            <a:endParaRPr lang="en-US" sz="1200" dirty="0"/>
+            <a:endParaRPr lang="en-US" sz="1150" dirty="0"/>
           </a:p>
         </p:txBody>
       </p:sp>
